--- a/SmartM365/Devices/Windows11UpgradeToolkit/Windows11UpgradeToolkit-Procedure-FR.pptx
+++ b/SmartM365/Devices/Windows11UpgradeToolkit/Windows11UpgradeToolkit-Procedure-FR.pptx
@@ -11867,7 +11867,7 @@
                 <a:ea typeface="Calibri" pitchFamily="34" charset="-122"/>
                 <a:cs typeface="Calibri" pitchFamily="34" charset="-120"/>
               </a:rPr>
-              <a:t>Accès au dépôt (GitHub Desktop)</a:t>
+              <a:t>ZIP opérateur vérifié</a:t>
             </a:r>
             <a:endParaRPr lang="en-US" sz="1250" dirty="0"/>
           </a:p>
@@ -11909,7 +11909,7 @@
                 <a:ea typeface="Calibri" pitchFamily="34" charset="-122"/>
                 <a:cs typeface="Calibri" pitchFamily="34" charset="-120"/>
               </a:rPr>
-              <a:t>Installer GitHub Desktop, créer un compte si nécessaire, se connecter, puis cloner/synchroniser https://github.com/khda79/workplacecloudhub.com en local, par ex. C:\WCH.</a:t>
+              <a:t>Télécharger la release 0.1.72, vérifier son SHA-256 selon le README, puis extraire le ZIP complet dans un nouveau dossier. GitHub Desktop est facultatif.</a:t>
             </a:r>
             <a:endParaRPr lang="en-US" sz="1000" dirty="0"/>
           </a:p>
@@ -12078,7 +12078,7 @@
                 <a:ea typeface="Calibri" pitchFamily="34" charset="-122"/>
                 <a:cs typeface="Calibri" pitchFamily="34" charset="-120"/>
               </a:rPr>
-              <a:t>PowerShell 5.1 ou 7+, accès au dépôt SmartM365, droits d'exécution des LOT.</a:t>
+              <a:t>GUI WPF : Windows PowerShell 5.1 / STA. Lanceurs LOT : PowerShell 7 privilégié, avec repli sur 5.1.</a:t>
             </a:r>
             <a:endParaRPr lang="en-US" sz="1000" dirty="0"/>
           </a:p>
@@ -12247,7 +12247,7 @@
                 <a:ea typeface="Calibri" pitchFamily="34" charset="-122"/>
                 <a:cs typeface="Calibri" pitchFamily="34" charset="-120"/>
               </a:rPr>
-              <a:t>PsExec.exe disponible dans Scripts\ ou %WINDIR%\System32, requis pour l'exécution SYSTEM sur les cibles.</a:t>
+              <a:t>Obtenir PsExec.exe auprès de Microsoft Sysinternals ; le placer dans Scripts ou dans le PATH pour exécuter les actions en SYSTEM.</a:t>
             </a:r>
             <a:endParaRPr lang="en-US" sz="1000" dirty="0"/>
           </a:p>
@@ -13584,7 +13584,7 @@
                 <a:ea typeface="Consolas" pitchFamily="34" charset="-122"/>
                 <a:cs typeface="Consolas" pitchFamily="34" charset="-120"/>
               </a:rPr>
-              <a:t>...LotLauncher-GUI.ps1  (GUI WinForms/WPF)</a:t>
+              <a:t>...LotLauncher-GUI.ps1  (GUI WPF)</a:t>
             </a:r>
             <a:endParaRPr lang="en-US" sz="1000" dirty="0"/>
           </a:p>
